--- a/classes/parte-8-blue-team-deteccion-y-soc/200-purple-team-desde-el-lado-defensivo/clase-200-presentacion.pptx
+++ b/classes/parte-8-blue-team-deteccion-y-soc/200-purple-team-desde-el-lado-defensivo/clase-200-presentacion.pptx
@@ -17,6 +17,11 @@
     <p:sldId id="265" r:id="rId16"/>
     <p:sldId id="266" r:id="rId17"/>
     <p:sldId id="267" r:id="rId18"/>
+    <p:sldId id="268" r:id="rId19"/>
+    <p:sldId id="269" r:id="rId20"/>
+    <p:sldId id="270" r:id="rId21"/>
+    <p:sldId id="271" r:id="rId22"/>
+    <p:sldId id="272" r:id="rId23"/>
   </p:sldIdLst>
   <p:sldSz cx="9144000" cy="6858000" type="screen4x3"/>
   <p:notesSz cx="6858000" cy="9144000"/>
@@ -3198,7 +3203,7 @@
                   <a:srgbClr val="0B3D2E"/>
                 </a:solidFill>
               </a:rPr>
-              <a:t>⚠️ Errores comunes</a:t>
+              <a:t>🧰 Herramientas y preparación</a:t>
             </a:r>
           </a:p>
         </p:txBody>
@@ -3236,67 +3241,97 @@
                   <a:srgbClr val="22282E"/>
                 </a:solidFill>
               </a:rPr>
-              <a:t>•  Purple se vuelve competición red vs blue — Falta objetivo común; enfócalo en mejorar cobertura juntos</a:t>
-            </a:r>
-          </a:p>
-          <a:p>
-            <a:pPr>
-              <a:spcAft>
-                <a:spcPts val="600"/>
-              </a:spcAft>
-            </a:pPr>
-            <a:r>
-              <a:rPr sz="1500">
-                <a:solidFill>
-                  <a:srgbClr val="22282E"/>
-                </a:solidFill>
-              </a:rPr>
-              <a:t>•  Detectas pasos sueltos pero no la cadena — Solo pruebas atómicas; encadena con Caldera para ver el flujo</a:t>
-            </a:r>
-          </a:p>
-          <a:p>
-            <a:pPr>
-              <a:spcAft>
-                <a:spcPts val="600"/>
-              </a:spcAft>
-            </a:pPr>
-            <a:r>
-              <a:rPr sz="1500">
-                <a:solidFill>
-                  <a:srgbClr val="22282E"/>
-                </a:solidFill>
-              </a:rPr>
-              <a:t>•  Ejercicio sin mejoras posteriores — No cierras el bucle; crea una detección por cada hueco</a:t>
-            </a:r>
-          </a:p>
-          <a:p>
-            <a:pPr>
-              <a:spcAft>
-                <a:spcPts val="600"/>
-              </a:spcAft>
-            </a:pPr>
-            <a:r>
-              <a:rPr sz="1500">
-                <a:solidFill>
-                  <a:srgbClr val="22282E"/>
-                </a:solidFill>
-              </a:rPr>
-              <a:t>•  Emulación poco realista — Técnicas al azar; guíate por un grupo y su intel</a:t>
-            </a:r>
-          </a:p>
-          <a:p>
-            <a:pPr>
-              <a:spcAft>
-                <a:spcPts val="600"/>
-              </a:spcAft>
-            </a:pPr>
-            <a:r>
-              <a:rPr sz="1500">
-                <a:solidFill>
-                  <a:srgbClr val="22282E"/>
-                </a:solidFill>
-              </a:rPr>
-              <a:t>•  Se hace una vez y se abandona — Purple es programa, no evento; define cadencia</a:t>
+              <a:t>•  En laboratorio aislado con la telemetría de toda la parte:</a:t>
+            </a:r>
+          </a:p>
+          <a:p>
+            <a:pPr>
+              <a:spcAft>
+                <a:spcPts val="600"/>
+              </a:spcAft>
+            </a:pPr>
+            <a:r>
+              <a:rPr sz="1500">
+                <a:solidFill>
+                  <a:srgbClr val="22282E"/>
+                </a:solidFill>
+              </a:rPr>
+              <a:t>•  Atomic Red Team para pruebas por técnica.</a:t>
+            </a:r>
+          </a:p>
+          <a:p>
+            <a:pPr>
+              <a:spcAft>
+                <a:spcPts val="600"/>
+              </a:spcAft>
+            </a:pPr>
+            <a:r>
+              <a:rPr sz="1500">
+                <a:solidFill>
+                  <a:srgbClr val="22282E"/>
+                </a:solidFill>
+              </a:rPr>
+              <a:t>•  MITRE Caldera para emulación encadenada con agentes.</a:t>
+            </a:r>
+          </a:p>
+          <a:p>
+            <a:pPr>
+              <a:spcAft>
+                <a:spcPts val="600"/>
+              </a:spcAft>
+            </a:pPr>
+            <a:r>
+              <a:rPr sz="1500">
+                <a:solidFill>
+                  <a:srgbClr val="22282E"/>
+                </a:solidFill>
+              </a:rPr>
+              <a:t>•  Tu stack de detección completo: Sysmon, SIEM (Splunk/Elastic/Wazuh), reglas Sigma, EDR de laboratorio.</a:t>
+            </a:r>
+          </a:p>
+          <a:p>
+            <a:pPr>
+              <a:spcAft>
+                <a:spcPts val="600"/>
+              </a:spcAft>
+            </a:pPr>
+            <a:r>
+              <a:rPr sz="1500">
+                <a:solidFill>
+                  <a:srgbClr val="22282E"/>
+                </a:solidFill>
+              </a:rPr>
+              <a:t>•  ATT&amp;CK Navigator para la scorecard.</a:t>
+            </a:r>
+          </a:p>
+          <a:p>
+            <a:pPr>
+              <a:spcAft>
+                <a:spcPts val="600"/>
+              </a:spcAft>
+            </a:pPr>
+            <a:r>
+              <a:rPr sz="1500">
+                <a:solidFill>
+                  <a:srgbClr val="22282E"/>
+                </a:solidFill>
+              </a:rPr>
+              <a:t>•  Una plantilla de ejercicio (objetivo, técnicas, resultados, mejoras).</a:t>
+            </a:r>
+          </a:p>
+          <a:p>
+            <a:pPr>
+              <a:spcAft>
+                <a:spcPts val="600"/>
+              </a:spcAft>
+            </a:pPr>
+            <a:r>
+              <a:rPr sz="1500">
+                <a:solidFill>
+                  <a:srgbClr val="22282E"/>
+                </a:solidFill>
+              </a:rPr>
+              <a:t>•  Ejecuta las emulaciones exclusivamente contra tus propios sistemas y documenta el alcance antes de empezar.</a:t>
             </a:r>
           </a:p>
         </p:txBody>
@@ -3347,7 +3382,7 @@
                   <a:srgbClr val="0B3D2E"/>
                 </a:solidFill>
               </a:rPr>
-              <a:t>❓ Preguntas frecuentes</a:t>
+              <a:t>🧪 Laboratorio guiado — Un ciclo purple completo</a:t>
             </a:r>
           </a:p>
         </p:txBody>
@@ -3385,82 +3420,97 @@
                   <a:srgbClr val="22282E"/>
                 </a:solidFill>
               </a:rPr>
-              <a:t>•  ❓ ¿En qué se diferencia purple de red team?</a:t>
-            </a:r>
-          </a:p>
-          <a:p>
-            <a:pPr>
-              <a:spcAft>
-                <a:spcPts val="600"/>
-              </a:spcAft>
-            </a:pPr>
-            <a:r>
-              <a:rPr sz="1500">
-                <a:solidFill>
-                  <a:srgbClr val="22282E"/>
-                </a:solidFill>
-              </a:rPr>
-              <a:t>•  El red team busca objetivos con sigilo y evalúa la resistencia global; el purple es colaborativo y transparente, optimizado para medir y mejorar detecciones técnica por técnica. Se complementan.</a:t>
-            </a:r>
-          </a:p>
-          <a:p>
-            <a:pPr>
-              <a:spcAft>
-                <a:spcPts val="600"/>
-              </a:spcAft>
-            </a:pPr>
-            <a:r>
-              <a:rPr sz="1500">
-                <a:solidFill>
-                  <a:srgbClr val="22282E"/>
-                </a:solidFill>
-              </a:rPr>
-              <a:t>•  ❓ ¿Atomic o Caldera?</a:t>
-            </a:r>
-          </a:p>
-          <a:p>
-            <a:pPr>
-              <a:spcAft>
-                <a:spcPts val="600"/>
-              </a:spcAft>
-            </a:pPr>
-            <a:r>
-              <a:rPr sz="1500">
-                <a:solidFill>
-                  <a:srgbClr val="22282E"/>
-                </a:solidFill>
-              </a:rPr>
-              <a:t>•  Ambos. Atomic valida técnicas individuales con rapidez; Caldera emula operaciones encadenadas y adversarios completos. Empieza por atómicas y escala a escenarios.</a:t>
-            </a:r>
-          </a:p>
-          <a:p>
-            <a:pPr>
-              <a:spcAft>
-                <a:spcPts val="600"/>
-              </a:spcAft>
-            </a:pPr>
-            <a:r>
-              <a:rPr sz="1500">
-                <a:solidFill>
-                  <a:srgbClr val="22282E"/>
-                </a:solidFill>
-              </a:rPr>
-              <a:t>•  ❓ ¿Con qué frecuencia hacer purple?</a:t>
-            </a:r>
-          </a:p>
-          <a:p>
-            <a:pPr>
-              <a:spcAft>
-                <a:spcPts val="600"/>
-              </a:spcAft>
-            </a:pPr>
-            <a:r>
-              <a:rPr sz="1500">
-                <a:solidFill>
-                  <a:srgbClr val="22282E"/>
-                </a:solidFill>
-              </a:rPr>
-              <a:t>•  Como programa continuo: ciclos regulares (p. ej. mensuales/trimestrales) que revalidan cobertura y cierran huecos. Un solo ejercicio da una foto; la cadencia da mejora sostenida.</a:t>
+              <a:t>•  Planifica. Elige un grupo de amenaza relevante (de la página Groups de ATT&amp;CK) y selecciona 8–10 técnicas suyas a emular.</a:t>
+            </a:r>
+          </a:p>
+          <a:p>
+            <a:pPr>
+              <a:spcAft>
+                <a:spcPts val="600"/>
+              </a:spcAft>
+            </a:pPr>
+            <a:r>
+              <a:rPr sz="1500">
+                <a:solidFill>
+                  <a:srgbClr val="22282E"/>
+                </a:solidFill>
+              </a:rPr>
+              <a:t>•  Prepara la scorecard. Crea una capa de Navigator con esas técnicas y un estado inicial "por probar".</a:t>
+            </a:r>
+          </a:p>
+          <a:p>
+            <a:pPr>
+              <a:spcAft>
+                <a:spcPts val="600"/>
+              </a:spcAft>
+            </a:pPr>
+            <a:r>
+              <a:rPr sz="1500">
+                <a:solidFill>
+                  <a:srgbClr val="22282E"/>
+                </a:solidFill>
+              </a:rPr>
+              <a:t>•  Ejecuta pruebas atómicas. Con Atomic Red Team, lanza cada técnica en el host de laboratorio (p. ej. T1059.001, T1053.005, T1105).</a:t>
+            </a:r>
+          </a:p>
+          <a:p>
+            <a:pPr>
+              <a:spcAft>
+                <a:spcPts val="600"/>
+              </a:spcAft>
+            </a:pPr>
+            <a:r>
+              <a:rPr sz="1500">
+                <a:solidFill>
+                  <a:srgbClr val="22282E"/>
+                </a:solidFill>
+              </a:rPr>
+              <a:t>•  Observa la detección. Para cada una, comprueba en el SIEM/EDR si fue prevenida, detectada, solo registrada o no vista.</a:t>
+            </a:r>
+          </a:p>
+          <a:p>
+            <a:pPr>
+              <a:spcAft>
+                <a:spcPts val="600"/>
+              </a:spcAft>
+            </a:pPr>
+            <a:r>
+              <a:rPr sz="1500">
+                <a:solidFill>
+                  <a:srgbClr val="22282E"/>
+                </a:solidFill>
+              </a:rPr>
+              <a:t>•  Encadena con Caldera. Lanza una operación que combine varias técnicas en secuencia y observa si detectas la cadena, no solo pasos sueltos.</a:t>
+            </a:r>
+          </a:p>
+          <a:p>
+            <a:pPr>
+              <a:spcAft>
+                <a:spcPts val="600"/>
+              </a:spcAft>
+            </a:pPr>
+            <a:r>
+              <a:rPr sz="1500">
+                <a:solidFill>
+                  <a:srgbClr val="22282E"/>
+                </a:solidFill>
+              </a:rPr>
+              <a:t>•  Puntúa. Colorea la scorecard: verde detectado, amarillo solo registrado, rojo no visto.</a:t>
+            </a:r>
+          </a:p>
+          <a:p>
+            <a:pPr>
+              <a:spcAft>
+                <a:spcPts val="600"/>
+              </a:spcAft>
+            </a:pPr>
+            <a:r>
+              <a:rPr sz="1500">
+                <a:solidFill>
+                  <a:srgbClr val="22282E"/>
+                </a:solidFill>
+              </a:rPr>
+              <a:t>•  Cierra huecos. Por cada técnica no vista o solo registrada, crea/afina una detección (Sigma) y vuelve a probar hasta que dispare.</a:t>
             </a:r>
           </a:p>
         </p:txBody>
@@ -3511,7 +3561,7 @@
                   <a:srgbClr val="0B3D2E"/>
                 </a:solidFill>
               </a:rPr>
-              <a:t>🔗 Referencias</a:t>
+              <a:t>✍️ Ejercicios</a:t>
             </a:r>
           </a:p>
         </p:txBody>
@@ -3549,71 +3599,727 @@
                   <a:srgbClr val="22282E"/>
                 </a:solidFill>
               </a:rPr>
-              <a:t>•  MITRE ATT&amp;CK y Groups — &lt;https://attack.mitre.org/groups/&gt;</a:t>
-            </a:r>
-          </a:p>
-          <a:p>
-            <a:pPr>
-              <a:spcAft>
-                <a:spcPts val="600"/>
-              </a:spcAft>
-            </a:pPr>
-            <a:r>
-              <a:rPr sz="1500">
-                <a:solidFill>
-                  <a:srgbClr val="22282E"/>
-                </a:solidFill>
-              </a:rPr>
-              <a:t>•  Atomic Red Team — &lt;https://github.com/redcanaryco/atomic-red-team&gt;</a:t>
-            </a:r>
-          </a:p>
-          <a:p>
-            <a:pPr>
-              <a:spcAft>
-                <a:spcPts val="600"/>
-              </a:spcAft>
-            </a:pPr>
-            <a:r>
-              <a:rPr sz="1500">
-                <a:solidFill>
-                  <a:srgbClr val="22282E"/>
-                </a:solidFill>
-              </a:rPr>
-              <a:t>•  MITRE Caldera — &lt;https://caldera.mitre.org/&gt;</a:t>
-            </a:r>
-          </a:p>
-          <a:p>
-            <a:pPr>
-              <a:spcAft>
-                <a:spcPts val="600"/>
-              </a:spcAft>
-            </a:pPr>
-            <a:r>
-              <a:rPr sz="1500">
-                <a:solidFill>
-                  <a:srgbClr val="22282E"/>
-                </a:solidFill>
-              </a:rPr>
-              <a:t>•  MITRE ATT&amp;CK Navigator — &lt;https://mitre-attack.github.io/attack-navigator/&gt;</a:t>
-            </a:r>
-          </a:p>
-          <a:p>
-            <a:pPr>
-              <a:spcAft>
-                <a:spcPts val="600"/>
-              </a:spcAft>
-            </a:pPr>
-            <a:r>
-              <a:rPr sz="1500">
-                <a:solidFill>
-                  <a:srgbClr val="22282E"/>
-                </a:solidFill>
-              </a:rPr>
-              <a:t>•  Murdoch, D. Blue Team Handbook: SOC, SIEM, and Threat Hunting Use Cases.</a:t>
-            </a:r>
-          </a:p>
-        </p:txBody>
-      </p:sp>
+              <a:t>•  Selecciona un grupo ATT&amp;CK y justifica por qué emularlo en tu contexto.</a:t>
+            </a:r>
+          </a:p>
+          <a:p>
+            <a:pPr>
+              <a:spcAft>
+                <a:spcPts val="600"/>
+              </a:spcAft>
+            </a:pPr>
+            <a:r>
+              <a:rPr sz="1500">
+                <a:solidFill>
+                  <a:srgbClr val="22282E"/>
+                </a:solidFill>
+              </a:rPr>
+              <a:t>•  Ejecuta 3 pruebas atómicas y clasifica su resultado (prevenido/detectado/no visto).</a:t>
+            </a:r>
+          </a:p>
+          <a:p>
+            <a:pPr>
+              <a:spcAft>
+                <a:spcPts val="600"/>
+              </a:spcAft>
+            </a:pPr>
+            <a:r>
+              <a:rPr sz="1500">
+                <a:solidFill>
+                  <a:srgbClr val="22282E"/>
+                </a:solidFill>
+              </a:rPr>
+              <a:t>•  Diseña una operación encadenada en Caldera con 4 técnicas.</a:t>
+            </a:r>
+          </a:p>
+          <a:p>
+            <a:pPr>
+              <a:spcAft>
+                <a:spcPts val="600"/>
+              </a:spcAft>
+            </a:pPr>
+            <a:r>
+              <a:rPr sz="1500">
+                <a:solidFill>
+                  <a:srgbClr val="22282E"/>
+                </a:solidFill>
+              </a:rPr>
+              <a:t>•  Construye una scorecard de detección en Navigator.</a:t>
+            </a:r>
+          </a:p>
+          <a:p>
+            <a:pPr>
+              <a:spcAft>
+                <a:spcPts val="600"/>
+              </a:spcAft>
+            </a:pPr>
+            <a:r>
+              <a:rPr sz="1500">
+                <a:solidFill>
+                  <a:srgbClr val="22282E"/>
+                </a:solidFill>
+              </a:rPr>
+              <a:t>•  Cierra un hueco creando una detección nueva y revalidándola.</a:t>
+            </a:r>
+          </a:p>
+          <a:p>
+            <a:pPr>
+              <a:spcAft>
+                <a:spcPts val="600"/>
+              </a:spcAft>
+            </a:pPr>
+            <a:r>
+              <a:rPr sz="1500">
+                <a:solidFill>
+                  <a:srgbClr val="22282E"/>
+                </a:solidFill>
+              </a:rPr>
+              <a:t>•  Define la cadencia y el alcance de un programa purple trimestral.</a:t>
+            </a:r>
+          </a:p>
+        </p:txBody>
+      </p:sp>
+    </p:spTree>
+  </p:cSld>
+  <p:clrMapOvr>
+    <a:masterClrMapping/>
+  </p:clrMapOvr>
+</p:sld>
+</file>
+
+<file path=ppt/slides/slide13.xml><?xml version="1.0" encoding="utf-8"?>
+<p:sld xmlns:a="http://schemas.openxmlformats.org/drawingml/2006/main" xmlns:p="http://schemas.openxmlformats.org/presentationml/2006/main" xmlns:r="http://schemas.openxmlformats.org/officeDocument/2006/relationships">
+  <p:cSld>
+    <p:spTree>
+      <p:nvGrpSpPr>
+        <p:cNvPr id="1" name=""/>
+        <p:cNvGrpSpPr/>
+        <p:nvPr/>
+      </p:nvGrpSpPr>
+      <p:grpSpPr/>
+      <p:sp>
+        <p:nvSpPr>
+          <p:cNvPr id="2" name="TextBox 1"/>
+          <p:cNvSpPr txBox="1"/>
+          <p:nvPr/>
+        </p:nvSpPr>
+        <p:spPr>
+          <a:xfrm>
+            <a:off x="457200" y="320040"/>
+            <a:ext cx="8229600" cy="822960"/>
+          </a:xfrm>
+          <a:prstGeom prst="rect">
+            <a:avLst/>
+          </a:prstGeom>
+          <a:noFill/>
+        </p:spPr>
+        <p:txBody>
+          <a:bodyPr wrap="square">
+            <a:spAutoFit/>
+          </a:bodyPr>
+          <a:lstStyle/>
+          <a:p>
+            <a:r>
+              <a:rPr sz="2600" b="1">
+                <a:solidFill>
+                  <a:srgbClr val="0B3D2E"/>
+                </a:solidFill>
+              </a:rPr>
+              <a:t>📝 Reto verificable</a:t>
+            </a:r>
+          </a:p>
+        </p:txBody>
+      </p:sp>
+      <p:sp>
+        <p:nvSpPr>
+          <p:cNvPr id="3" name="TextBox 2"/>
+          <p:cNvSpPr txBox="1"/>
+          <p:nvPr/>
+        </p:nvSpPr>
+        <p:spPr>
+          <a:xfrm>
+            <a:off x="457200" y="1280160"/>
+            <a:ext cx="8229600" cy="4937760"/>
+          </a:xfrm>
+          <a:prstGeom prst="rect">
+            <a:avLst/>
+          </a:prstGeom>
+          <a:noFill/>
+        </p:spPr>
+        <p:txBody>
+          <a:bodyPr wrap="square">
+            <a:spAutoFit/>
+          </a:bodyPr>
+          <a:lstStyle/>
+          <a:p>
+            <a:pPr>
+              <a:spcAft>
+                <a:spcPts val="600"/>
+              </a:spcAft>
+            </a:pPr>
+            <a:r>
+              <a:rPr sz="1500">
+                <a:solidFill>
+                  <a:srgbClr val="22282E"/>
+                </a:solidFill>
+              </a:rPr>
+              <a:t>•  Ejecuta un ciclo purple completo sobre al menos 8 técnicas: emúlalas, puntúa la cobertura, cierra los huecos con detecciones nuevas y revalida. Criterio de aceptación: entregas una scorecard…</a:t>
+            </a:r>
+          </a:p>
+        </p:txBody>
+      </p:sp>
+    </p:spTree>
+  </p:cSld>
+  <p:clrMapOvr>
+    <a:masterClrMapping/>
+  </p:clrMapOvr>
+</p:sld>
+</file>
+
+<file path=ppt/slides/slide14.xml><?xml version="1.0" encoding="utf-8"?>
+<p:sld xmlns:a="http://schemas.openxmlformats.org/drawingml/2006/main" xmlns:p="http://schemas.openxmlformats.org/presentationml/2006/main" xmlns:r="http://schemas.openxmlformats.org/officeDocument/2006/relationships">
+  <p:cSld>
+    <p:spTree>
+      <p:nvGrpSpPr>
+        <p:cNvPr id="1" name=""/>
+        <p:cNvGrpSpPr/>
+        <p:nvPr/>
+      </p:nvGrpSpPr>
+      <p:grpSpPr/>
+      <p:sp>
+        <p:nvSpPr>
+          <p:cNvPr id="2" name="TextBox 1"/>
+          <p:cNvSpPr txBox="1"/>
+          <p:nvPr/>
+        </p:nvSpPr>
+        <p:spPr>
+          <a:xfrm>
+            <a:off x="457200" y="320040"/>
+            <a:ext cx="8229600" cy="822960"/>
+          </a:xfrm>
+          <a:prstGeom prst="rect">
+            <a:avLst/>
+          </a:prstGeom>
+          <a:noFill/>
+        </p:spPr>
+        <p:txBody>
+          <a:bodyPr wrap="square">
+            <a:spAutoFit/>
+          </a:bodyPr>
+          <a:lstStyle/>
+          <a:p>
+            <a:r>
+              <a:rPr sz="2600" b="1">
+                <a:solidFill>
+                  <a:srgbClr val="0B3D2E"/>
+                </a:solidFill>
+              </a:rPr>
+              <a:t>⚠️ Errores comunes</a:t>
+            </a:r>
+          </a:p>
+        </p:txBody>
+      </p:sp>
+      <p:sp>
+        <p:nvSpPr>
+          <p:cNvPr id="3" name="TextBox 2"/>
+          <p:cNvSpPr txBox="1"/>
+          <p:nvPr/>
+        </p:nvSpPr>
+        <p:spPr>
+          <a:xfrm>
+            <a:off x="457200" y="1280160"/>
+            <a:ext cx="8229600" cy="4937760"/>
+          </a:xfrm>
+          <a:prstGeom prst="rect">
+            <a:avLst/>
+          </a:prstGeom>
+          <a:noFill/>
+        </p:spPr>
+        <p:txBody>
+          <a:bodyPr wrap="square">
+            <a:spAutoFit/>
+          </a:bodyPr>
+          <a:lstStyle/>
+          <a:p>
+            <a:pPr>
+              <a:spcAft>
+                <a:spcPts val="600"/>
+              </a:spcAft>
+            </a:pPr>
+            <a:r>
+              <a:rPr sz="1500">
+                <a:solidFill>
+                  <a:srgbClr val="22282E"/>
+                </a:solidFill>
+              </a:rPr>
+              <a:t>•  Purple se vuelve competición red vs blue — Falta objetivo común; enfócalo en mejorar cobertura juntos</a:t>
+            </a:r>
+          </a:p>
+          <a:p>
+            <a:pPr>
+              <a:spcAft>
+                <a:spcPts val="600"/>
+              </a:spcAft>
+            </a:pPr>
+            <a:r>
+              <a:rPr sz="1500">
+                <a:solidFill>
+                  <a:srgbClr val="22282E"/>
+                </a:solidFill>
+              </a:rPr>
+              <a:t>•  Detectas pasos sueltos pero no la cadena — Solo pruebas atómicas; encadena con Caldera para ver el flujo</a:t>
+            </a:r>
+          </a:p>
+          <a:p>
+            <a:pPr>
+              <a:spcAft>
+                <a:spcPts val="600"/>
+              </a:spcAft>
+            </a:pPr>
+            <a:r>
+              <a:rPr sz="1500">
+                <a:solidFill>
+                  <a:srgbClr val="22282E"/>
+                </a:solidFill>
+              </a:rPr>
+              <a:t>•  Ejercicio sin mejoras posteriores — No cierras el bucle; crea una detección por cada hueco</a:t>
+            </a:r>
+          </a:p>
+          <a:p>
+            <a:pPr>
+              <a:spcAft>
+                <a:spcPts val="600"/>
+              </a:spcAft>
+            </a:pPr>
+            <a:r>
+              <a:rPr sz="1500">
+                <a:solidFill>
+                  <a:srgbClr val="22282E"/>
+                </a:solidFill>
+              </a:rPr>
+              <a:t>•  Emulación poco realista — Técnicas al azar; guíate por un grupo y su intel</a:t>
+            </a:r>
+          </a:p>
+          <a:p>
+            <a:pPr>
+              <a:spcAft>
+                <a:spcPts val="600"/>
+              </a:spcAft>
+            </a:pPr>
+            <a:r>
+              <a:rPr sz="1500">
+                <a:solidFill>
+                  <a:srgbClr val="22282E"/>
+                </a:solidFill>
+              </a:rPr>
+              <a:t>•  Se hace una vez y se abandona — Purple es programa, no evento; define cadencia</a:t>
+            </a:r>
+          </a:p>
+        </p:txBody>
+      </p:sp>
+    </p:spTree>
+  </p:cSld>
+  <p:clrMapOvr>
+    <a:masterClrMapping/>
+  </p:clrMapOvr>
+</p:sld>
+</file>
+
+<file path=ppt/slides/slide15.xml><?xml version="1.0" encoding="utf-8"?>
+<p:sld xmlns:a="http://schemas.openxmlformats.org/drawingml/2006/main" xmlns:p="http://schemas.openxmlformats.org/presentationml/2006/main" xmlns:r="http://schemas.openxmlformats.org/officeDocument/2006/relationships">
+  <p:cSld>
+    <p:spTree>
+      <p:nvGrpSpPr>
+        <p:cNvPr id="1" name=""/>
+        <p:cNvGrpSpPr/>
+        <p:nvPr/>
+      </p:nvGrpSpPr>
+      <p:grpSpPr/>
+      <p:sp>
+        <p:nvSpPr>
+          <p:cNvPr id="2" name="TextBox 1"/>
+          <p:cNvSpPr txBox="1"/>
+          <p:nvPr/>
+        </p:nvSpPr>
+        <p:spPr>
+          <a:xfrm>
+            <a:off x="457200" y="320040"/>
+            <a:ext cx="8229600" cy="822960"/>
+          </a:xfrm>
+          <a:prstGeom prst="rect">
+            <a:avLst/>
+          </a:prstGeom>
+          <a:noFill/>
+        </p:spPr>
+        <p:txBody>
+          <a:bodyPr wrap="square">
+            <a:spAutoFit/>
+          </a:bodyPr>
+          <a:lstStyle/>
+          <a:p>
+            <a:r>
+              <a:rPr sz="2600" b="1">
+                <a:solidFill>
+                  <a:srgbClr val="0B3D2E"/>
+                </a:solidFill>
+              </a:rPr>
+              <a:t>❓ Preguntas frecuentes</a:t>
+            </a:r>
+          </a:p>
+        </p:txBody>
+      </p:sp>
+      <p:sp>
+        <p:nvSpPr>
+          <p:cNvPr id="3" name="TextBox 2"/>
+          <p:cNvSpPr txBox="1"/>
+          <p:nvPr/>
+        </p:nvSpPr>
+        <p:spPr>
+          <a:xfrm>
+            <a:off x="457200" y="1280160"/>
+            <a:ext cx="8229600" cy="4937760"/>
+          </a:xfrm>
+          <a:prstGeom prst="rect">
+            <a:avLst/>
+          </a:prstGeom>
+          <a:noFill/>
+        </p:spPr>
+        <p:txBody>
+          <a:bodyPr wrap="square">
+            <a:spAutoFit/>
+          </a:bodyPr>
+          <a:lstStyle/>
+          <a:p>
+            <a:pPr>
+              <a:spcAft>
+                <a:spcPts val="600"/>
+              </a:spcAft>
+            </a:pPr>
+            <a:r>
+              <a:rPr sz="1500">
+                <a:solidFill>
+                  <a:srgbClr val="22282E"/>
+                </a:solidFill>
+              </a:rPr>
+              <a:t>•  ❓ ¿En qué se diferencia purple de red team?</a:t>
+            </a:r>
+          </a:p>
+          <a:p>
+            <a:pPr>
+              <a:spcAft>
+                <a:spcPts val="600"/>
+              </a:spcAft>
+            </a:pPr>
+            <a:r>
+              <a:rPr sz="1500">
+                <a:solidFill>
+                  <a:srgbClr val="22282E"/>
+                </a:solidFill>
+              </a:rPr>
+              <a:t>•  El red team busca objetivos con sigilo y evalúa la resistencia global; el purple es colaborativo y transparente, optimizado para medir y mejorar detecciones técnica por técnica. Se complementan.</a:t>
+            </a:r>
+          </a:p>
+          <a:p>
+            <a:pPr>
+              <a:spcAft>
+                <a:spcPts val="600"/>
+              </a:spcAft>
+            </a:pPr>
+            <a:r>
+              <a:rPr sz="1500">
+                <a:solidFill>
+                  <a:srgbClr val="22282E"/>
+                </a:solidFill>
+              </a:rPr>
+              <a:t>•  ❓ ¿Atomic o Caldera?</a:t>
+            </a:r>
+          </a:p>
+          <a:p>
+            <a:pPr>
+              <a:spcAft>
+                <a:spcPts val="600"/>
+              </a:spcAft>
+            </a:pPr>
+            <a:r>
+              <a:rPr sz="1500">
+                <a:solidFill>
+                  <a:srgbClr val="22282E"/>
+                </a:solidFill>
+              </a:rPr>
+              <a:t>•  Ambos. Atomic valida técnicas individuales con rapidez; Caldera emula operaciones encadenadas y adversarios completos. Empieza por atómicas y escala a escenarios.</a:t>
+            </a:r>
+          </a:p>
+          <a:p>
+            <a:pPr>
+              <a:spcAft>
+                <a:spcPts val="600"/>
+              </a:spcAft>
+            </a:pPr>
+            <a:r>
+              <a:rPr sz="1500">
+                <a:solidFill>
+                  <a:srgbClr val="22282E"/>
+                </a:solidFill>
+              </a:rPr>
+              <a:t>•  ❓ ¿Con qué frecuencia hacer purple?</a:t>
+            </a:r>
+          </a:p>
+          <a:p>
+            <a:pPr>
+              <a:spcAft>
+                <a:spcPts val="600"/>
+              </a:spcAft>
+            </a:pPr>
+            <a:r>
+              <a:rPr sz="1500">
+                <a:solidFill>
+                  <a:srgbClr val="22282E"/>
+                </a:solidFill>
+              </a:rPr>
+              <a:t>•  Como programa continuo: ciclos regulares (p. ej. mensuales/trimestrales) que revalidan cobertura y cierran huecos. Un solo ejercicio da una foto; la cadencia da mejora sostenida.</a:t>
+            </a:r>
+          </a:p>
+        </p:txBody>
+      </p:sp>
+    </p:spTree>
+  </p:cSld>
+  <p:clrMapOvr>
+    <a:masterClrMapping/>
+  </p:clrMapOvr>
+</p:sld>
+</file>
+
+<file path=ppt/slides/slide16.xml><?xml version="1.0" encoding="utf-8"?>
+<p:sld xmlns:a="http://schemas.openxmlformats.org/drawingml/2006/main" xmlns:p="http://schemas.openxmlformats.org/presentationml/2006/main" xmlns:r="http://schemas.openxmlformats.org/officeDocument/2006/relationships">
+  <p:cSld>
+    <p:spTree>
+      <p:nvGrpSpPr>
+        <p:cNvPr id="1" name=""/>
+        <p:cNvGrpSpPr/>
+        <p:nvPr/>
+      </p:nvGrpSpPr>
+      <p:grpSpPr/>
+      <p:sp>
+        <p:nvSpPr>
+          <p:cNvPr id="2" name="TextBox 1"/>
+          <p:cNvSpPr txBox="1"/>
+          <p:nvPr/>
+        </p:nvSpPr>
+        <p:spPr>
+          <a:xfrm>
+            <a:off x="457200" y="320040"/>
+            <a:ext cx="8229600" cy="822960"/>
+          </a:xfrm>
+          <a:prstGeom prst="rect">
+            <a:avLst/>
+          </a:prstGeom>
+          <a:noFill/>
+        </p:spPr>
+        <p:txBody>
+          <a:bodyPr wrap="square">
+            <a:spAutoFit/>
+          </a:bodyPr>
+          <a:lstStyle/>
+          <a:p>
+            <a:r>
+              <a:rPr sz="2600" b="1">
+                <a:solidFill>
+                  <a:srgbClr val="0B3D2E"/>
+                </a:solidFill>
+              </a:rPr>
+              <a:t>🔗 Referencias verificables y alcance</a:t>
+            </a:r>
+          </a:p>
+        </p:txBody>
+      </p:sp>
+      <p:sp>
+        <p:nvSpPr>
+          <p:cNvPr id="3" name="TextBox 2"/>
+          <p:cNvSpPr txBox="1"/>
+          <p:nvPr/>
+        </p:nvSpPr>
+        <p:spPr>
+          <a:xfrm>
+            <a:off x="457200" y="1280160"/>
+            <a:ext cx="8229600" cy="4937760"/>
+          </a:xfrm>
+          <a:prstGeom prst="rect">
+            <a:avLst/>
+          </a:prstGeom>
+          <a:noFill/>
+        </p:spPr>
+        <p:txBody>
+          <a:bodyPr wrap="square">
+            <a:spAutoFit/>
+          </a:bodyPr>
+          <a:lstStyle/>
+          <a:p>
+            <a:pPr>
+              <a:spcAft>
+                <a:spcPts val="600"/>
+              </a:spcAft>
+            </a:pPr>
+            <a:r>
+              <a:rPr sz="1500">
+                <a:solidFill>
+                  <a:srgbClr val="22282E"/>
+                </a:solidFill>
+              </a:rPr>
+              <a:t>•  MITRE ATT&amp;CK Groups: fuente primaria para procedimientos públicamente asociados con grupos; se usa para seleccionar escenarios relevantes, no para atribuir actividad observada —…</a:t>
+            </a:r>
+          </a:p>
+          <a:p>
+            <a:pPr>
+              <a:spcAft>
+                <a:spcPts val="600"/>
+              </a:spcAft>
+            </a:pPr>
+            <a:r>
+              <a:rPr sz="1500">
+                <a:solidFill>
+                  <a:srgbClr val="22282E"/>
+                </a:solidFill>
+              </a:rPr>
+              <a:t>•  Atomic Red Team: documentación oficial de pruebas focalizadas con autorización, prerrequisitos y limpieza; sirve para verificar capas concretas de evidencia —…</a:t>
+            </a:r>
+          </a:p>
+          <a:p>
+            <a:pPr>
+              <a:spcAft>
+                <a:spcPts val="600"/>
+              </a:spcAft>
+            </a:pPr>
+            <a:r>
+              <a:rPr sz="1500">
+                <a:solidFill>
+                  <a:srgbClr val="22282E"/>
+                </a:solidFill>
+              </a:rPr>
+              <a:t>•  Apache Caldera: documentación oficial de perfiles y ejecución de emulación; una operación segura todavía requiere alcance, controles y monitoreo locales — &lt;https://caldera.apache.org/&gt;</a:t>
+            </a:r>
+          </a:p>
+          <a:p>
+            <a:pPr>
+              <a:spcAft>
+                <a:spcPts val="600"/>
+              </a:spcAft>
+            </a:pPr>
+            <a:r>
+              <a:rPr sz="1500">
+                <a:solidFill>
+                  <a:srgbClr val="22282E"/>
+                </a:solidFill>
+              </a:rPr>
+              <a:t>•  MITRE ATT&amp;CK Navigator: herramienta oficial para registrar y comparar estados de cobertura antes y después de las pruebas — &lt;https://mitre-attack.github.io/attack-navigator/&gt;</a:t>
+            </a:r>
+          </a:p>
+          <a:p>
+            <a:pPr>
+              <a:spcAft>
+                <a:spcPts val="600"/>
+              </a:spcAft>
+            </a:pPr>
+            <a:r>
+              <a:rPr sz="1500">
+                <a:solidFill>
+                  <a:srgbClr val="22282E"/>
+                </a:solidFill>
+              </a:rPr>
+              <a:t>•  NIST SP 800-115: guía primaria para planificar, ejecutar y documentar pruebas técnicas autorizadas; aporta reglas de compromiso y manejo de hallazgos — &lt;https://doi.org/10.6028/NIST.SP.800-115&gt;</a:t>
+            </a:r>
+          </a:p>
+          <a:p>
+            <a:pPr>
+              <a:spcAft>
+                <a:spcPts val="600"/>
+              </a:spcAft>
+            </a:pPr>
+            <a:r>
+              <a:rPr sz="1500">
+                <a:solidFill>
+                  <a:srgbClr val="22282E"/>
+                </a:solidFill>
+              </a:rPr>
+              <a:t>•  Murdoch, D. Blue Team Handbook: SOC, SIEM, and Threat Hunting Use Cases: bibliografía profesional complementaria.</a:t>
+            </a:r>
+          </a:p>
+        </p:txBody>
+      </p:sp>
+    </p:spTree>
+  </p:cSld>
+  <p:clrMapOvr>
+    <a:masterClrMapping/>
+  </p:clrMapOvr>
+</p:sld>
+</file>
+
+<file path=ppt/slides/slide17.xml><?xml version="1.0" encoding="utf-8"?>
+<p:sld xmlns:a="http://schemas.openxmlformats.org/drawingml/2006/main" xmlns:p="http://schemas.openxmlformats.org/presentationml/2006/main" xmlns:r="http://schemas.openxmlformats.org/officeDocument/2006/relationships">
+  <p:cSld>
+    <p:spTree>
+      <p:nvGrpSpPr>
+        <p:cNvPr id="1" name=""/>
+        <p:cNvGrpSpPr/>
+        <p:nvPr/>
+      </p:nvGrpSpPr>
+      <p:grpSpPr/>
+      <p:sp>
+        <p:nvSpPr>
+          <p:cNvPr id="2" name="TextBox 1"/>
+          <p:cNvSpPr txBox="1"/>
+          <p:nvPr/>
+        </p:nvSpPr>
+        <p:spPr>
+          <a:xfrm>
+            <a:off x="457200" y="274320"/>
+            <a:ext cx="8229600" cy="640080"/>
+          </a:xfrm>
+          <a:prstGeom prst="rect">
+            <a:avLst/>
+          </a:prstGeom>
+          <a:noFill/>
+        </p:spPr>
+        <p:txBody>
+          <a:bodyPr wrap="square">
+            <a:spAutoFit/>
+          </a:bodyPr>
+          <a:lstStyle/>
+          <a:p>
+            <a:r>
+              <a:rPr sz="2200" b="1">
+                <a:solidFill>
+                  <a:srgbClr val="0B3D2E"/>
+                </a:solidFill>
+              </a:rPr>
+              <a:t>Diagrama de la clase</a:t>
+            </a:r>
+          </a:p>
+        </p:txBody>
+      </p:sp>
+      <p:pic>
+        <p:nvPicPr>
+          <p:cNvPr id="3" name="Picture 2" descr="9ca9a081f3e9f58d.png"/>
+          <p:cNvPicPr>
+            <a:picLocks noChangeAspect="1"/>
+          </p:cNvPicPr>
+          <p:nvPr/>
+        </p:nvPicPr>
+        <p:blipFill>
+          <a:blip r:embed="rId2"/>
+          <a:stretch>
+            <a:fillRect/>
+          </a:stretch>
+        </p:blipFill>
+        <p:spPr>
+          <a:xfrm>
+            <a:off x="457200" y="3543300"/>
+            <a:ext cx="8229600" cy="411480"/>
+          </a:xfrm>
+          <a:prstGeom prst="rect">
+            <a:avLst/>
+          </a:prstGeom>
+        </p:spPr>
+      </p:pic>
     </p:spTree>
   </p:cSld>
   <p:clrMapOvr>
@@ -3698,7 +4404,7 @@
                   <a:srgbClr val="22282E"/>
                 </a:solidFill>
               </a:rPr>
-              <a:t>•  Cerrar la parte uniendo ataque y defensa: el purple team es la colaboración deliberada entre red y blue para validar y mejorar la detección de forma iterativa. Desde el lado defensivo, aprenderás a diseñar ejercicios de emulación de adversario, a ejecutar técnicas de forma controlada (Atomic Red Team, Caldera), a medir qué detectas y a cerrar cada hueco con una detección nueva.</a:t>
+              <a:t>•  Cerrar la parte uniendo ataque y defensa: el purple team es la colaboración deliberada entre red y blue para validar y mejorar la detección de forma iterativa. Desde el lado defensivo, aprenderás a…</a:t>
             </a:r>
           </a:p>
         </p:txBody>
@@ -4092,7 +4798,7 @@
                   <a:srgbClr val="0B3D2E"/>
                 </a:solidFill>
               </a:rPr>
-              <a:t>📖 Definiciones y características</a:t>
+              <a:t>🧠 Explicación en profundidad</a:t>
             </a:r>
           </a:p>
         </p:txBody>
@@ -4130,97 +4836,97 @@
                   <a:srgbClr val="22282E"/>
                 </a:solidFill>
               </a:rPr>
-              <a:t>•  Purple team: ejercicio colaborativo donde red ejecuta técnicas y blue mide y mejora la detección en tiempo real. Característica: objetivo compartido de subir la cobertura.</a:t>
-            </a:r>
-          </a:p>
-          <a:p>
-            <a:pPr>
-              <a:spcAft>
-                <a:spcPts val="600"/>
-              </a:spcAft>
-            </a:pPr>
-            <a:r>
-              <a:rPr sz="1500">
-                <a:solidFill>
-                  <a:srgbClr val="22282E"/>
-                </a:solidFill>
-              </a:rPr>
-              <a:t>•  Emulación de adversario: reproducir el comportamiento de un actor real (sus TTPs) de forma fiel. Característica: guiada por intel de un grupo concreto.</a:t>
-            </a:r>
-          </a:p>
-          <a:p>
-            <a:pPr>
-              <a:spcAft>
-                <a:spcPts val="600"/>
-              </a:spcAft>
-            </a:pPr>
-            <a:r>
-              <a:rPr sz="1500">
-                <a:solidFill>
-                  <a:srgbClr val="22282E"/>
-                </a:solidFill>
-              </a:rPr>
-              <a:t>•  Atomic Red Team: biblioteca de pruebas pequeñas y atómicas, una por técnica ATT&amp;CK. Característica: rápidas, granulares y reproducibles.</a:t>
-            </a:r>
-          </a:p>
-          <a:p>
-            <a:pPr>
-              <a:spcAft>
-                <a:spcPts val="600"/>
-              </a:spcAft>
-            </a:pPr>
-            <a:r>
-              <a:rPr sz="1500">
-                <a:solidFill>
-                  <a:srgbClr val="22282E"/>
-                </a:solidFill>
-              </a:rPr>
-              <a:t>•  Caldera: plataforma de MITRE para emulación automatizada y encadenada. Característica: ejecuta operaciones completas con agentes.</a:t>
-            </a:r>
-          </a:p>
-          <a:p>
-            <a:pPr>
-              <a:spcAft>
-                <a:spcPts val="600"/>
-              </a:spcAft>
-            </a:pPr>
-            <a:r>
-              <a:rPr sz="1500">
-                <a:solidFill>
-                  <a:srgbClr val="22282E"/>
-                </a:solidFill>
-              </a:rPr>
-              <a:t>•  Scorecard de detección: matriz de resultados por técnica (prevenido/detectado/registrado/no visto). Característica: comunica la cobertura real.</a:t>
-            </a:r>
-          </a:p>
-          <a:p>
-            <a:pPr>
-              <a:spcAft>
-                <a:spcPts val="600"/>
-              </a:spcAft>
-            </a:pPr>
-            <a:r>
-              <a:rPr sz="1500">
-                <a:solidFill>
-                  <a:srgbClr val="22282E"/>
-                </a:solidFill>
-              </a:rPr>
-              <a:t>•  Cierre del bucle: crear/afinar una detección por cada hueco hallado. Característica: convierte el ejercicio en mejora permanente.</a:t>
-            </a:r>
-          </a:p>
-          <a:p>
-            <a:pPr>
-              <a:spcAft>
-                <a:spcPts val="600"/>
-              </a:spcAft>
-            </a:pPr>
-            <a:r>
-              <a:rPr sz="1500">
-                <a:solidFill>
-                  <a:srgbClr val="22282E"/>
-                </a:solidFill>
-              </a:rPr>
-              <a:t>•  Cadencia: frecuencia de los ejercicios purple. Característica: el valor está en la repetición, no en un evento aislado.</a:t>
+              <a:t>•  Purple team es colaboración orientada a evidencia, no necesariamente un equipo permanente. Se acuerdan comportamiento, activo, procedimiento seguro, datos esperados, detención y responsables. Una…</a:t>
+            </a:r>
+          </a:p>
+          <a:p>
+            <a:pPr>
+              <a:spcAft>
+                <a:spcPts val="600"/>
+              </a:spcAft>
+            </a:pPr>
+            <a:r>
+              <a:rPr sz="1500">
+                <a:solidFill>
+                  <a:srgbClr val="22282E"/>
+                </a:solidFill>
+              </a:rPr>
+              <a:t>•  El scorecard separa telemetría, analítica, alerta y respuesta; «detectado/no detectado» oculta dónde falló la cadena. Atomic Red Team ofrece pruebas pequeñas y Apache Caldera (Incubating) orquesta…</a:t>
+            </a:r>
+          </a:p>
+          <a:p>
+            <a:pPr>
+              <a:spcAft>
+                <a:spcPts val="600"/>
+              </a:spcAft>
+            </a:pPr>
+            <a:r>
+              <a:rPr sz="1500">
+                <a:solidFill>
+                  <a:srgbClr val="22282E"/>
+                </a:solidFill>
+              </a:rPr>
+              <a:t>•  El equipo elige comportamiento por amenaza y activo, no por herramienta atractiva. Para validar PowerShell iniciado desde Office se define host de laboratorio, procedimiento, evento esperado, regla…</a:t>
+            </a:r>
+          </a:p>
+          <a:p>
+            <a:pPr>
+              <a:spcAft>
+                <a:spcPts val="600"/>
+              </a:spcAft>
+            </a:pPr>
+            <a:r>
+              <a:rPr sz="1500">
+                <a:solidFill>
+                  <a:srgbClr val="22282E"/>
+                </a:solidFill>
+              </a:rPr>
+              <a:t>•  Atomic Red Team documenta tests pequeños con prerequisitos y cleanup. Sirve para comprobar un eslabón de forma repetible. Apache Caldera (Incubating) permite orquestar abilities y perfiles de…</a:t>
+            </a:r>
+          </a:p>
+          <a:p>
+            <a:pPr>
+              <a:spcAft>
+                <a:spcPts val="600"/>
+              </a:spcAft>
+            </a:pPr>
+            <a:r>
+              <a:rPr sz="1500">
+                <a:solidFill>
+                  <a:srgbClr val="22282E"/>
+                </a:solidFill>
+              </a:rPr>
+              <a:t>•  Si se ejecutó el procedimiento y no hay evento, la brecha está en sensor o configuración. Si hay dato pero la regla no coincide, está en analítica o mapeo. Si coincide sin generar alerta, está en…</a:t>
+            </a:r>
+          </a:p>
+          <a:p>
+            <a:pPr>
+              <a:spcAft>
+                <a:spcPts val="600"/>
+              </a:spcAft>
+            </a:pPr>
+            <a:r>
+              <a:rPr sz="1500">
+                <a:solidFill>
+                  <a:srgbClr val="22282E"/>
+                </a:solidFill>
+              </a:rPr>
+              <a:t>•  El resultado registra evidencia de cada capa, tiempos, versión y limitaciones. Una prueba de Windows no acredita Linux; una variante con línea de comandos fija no acredita todas las evasiones. ATT&amp;CK…</a:t>
+            </a:r>
+          </a:p>
+          <a:p>
+            <a:pPr>
+              <a:spcAft>
+                <a:spcPts val="600"/>
+              </a:spcAft>
+            </a:pPr>
+            <a:r>
+              <a:rPr sz="1500">
+                <a:solidFill>
+                  <a:srgbClr val="22282E"/>
+                </a:solidFill>
+              </a:rPr>
+              <a:t>•  El red team explica intención y artefactos sin convertir la sesión en una demostración competitiva. El blue team muestra qué vio y cómo razonó. Juntos modifican dato, regla o proceso y repiten. La…</a:t>
             </a:r>
           </a:p>
         </p:txBody>
@@ -4271,7 +4977,7 @@
                   <a:srgbClr val="0B3D2E"/>
                 </a:solidFill>
               </a:rPr>
-              <a:t>🧰 Herramientas y preparación</a:t>
+              <a:t>📔 Glosario</a:t>
             </a:r>
           </a:p>
         </p:txBody>
@@ -4309,97 +5015,97 @@
                   <a:srgbClr val="22282E"/>
                 </a:solidFill>
               </a:rPr>
-              <a:t>•  En laboratorio aislado con la telemetría de toda la parte:</a:t>
-            </a:r>
-          </a:p>
-          <a:p>
-            <a:pPr>
-              <a:spcAft>
-                <a:spcPts val="600"/>
-              </a:spcAft>
-            </a:pPr>
-            <a:r>
-              <a:rPr sz="1500">
-                <a:solidFill>
-                  <a:srgbClr val="22282E"/>
-                </a:solidFill>
-              </a:rPr>
-              <a:t>•  Atomic Red Team para pruebas por técnica.</a:t>
-            </a:r>
-          </a:p>
-          <a:p>
-            <a:pPr>
-              <a:spcAft>
-                <a:spcPts val="600"/>
-              </a:spcAft>
-            </a:pPr>
-            <a:r>
-              <a:rPr sz="1500">
-                <a:solidFill>
-                  <a:srgbClr val="22282E"/>
-                </a:solidFill>
-              </a:rPr>
-              <a:t>•  MITRE Caldera para emulación encadenada con agentes.</a:t>
-            </a:r>
-          </a:p>
-          <a:p>
-            <a:pPr>
-              <a:spcAft>
-                <a:spcPts val="600"/>
-              </a:spcAft>
-            </a:pPr>
-            <a:r>
-              <a:rPr sz="1500">
-                <a:solidFill>
-                  <a:srgbClr val="22282E"/>
-                </a:solidFill>
-              </a:rPr>
-              <a:t>•  Tu stack de detección completo: Sysmon, SIEM (Splunk/Elastic/Wazuh), reglas Sigma, EDR de laboratorio.</a:t>
-            </a:r>
-          </a:p>
-          <a:p>
-            <a:pPr>
-              <a:spcAft>
-                <a:spcPts val="600"/>
-              </a:spcAft>
-            </a:pPr>
-            <a:r>
-              <a:rPr sz="1500">
-                <a:solidFill>
-                  <a:srgbClr val="22282E"/>
-                </a:solidFill>
-              </a:rPr>
-              <a:t>•  ATT&amp;CK Navigator para la scorecard.</a:t>
-            </a:r>
-          </a:p>
-          <a:p>
-            <a:pPr>
-              <a:spcAft>
-                <a:spcPts val="600"/>
-              </a:spcAft>
-            </a:pPr>
-            <a:r>
-              <a:rPr sz="1500">
-                <a:solidFill>
-                  <a:srgbClr val="22282E"/>
-                </a:solidFill>
-              </a:rPr>
-              <a:t>•  Una plantilla de ejercicio (objetivo, técnicas, resultados, mejoras).</a:t>
-            </a:r>
-          </a:p>
-          <a:p>
-            <a:pPr>
-              <a:spcAft>
-                <a:spcPts val="600"/>
-              </a:spcAft>
-            </a:pPr>
-            <a:r>
-              <a:rPr sz="1500">
-                <a:solidFill>
-                  <a:srgbClr val="22282E"/>
-                </a:solidFill>
-              </a:rPr>
-              <a:t>•  Ejecuta las emulaciones exclusivamente contra tus propios sistemas y documenta el alcance antes de empezar.</a:t>
+              <a:t>•  Purple teaming: colaboración para mejorar controles.</a:t>
+            </a:r>
+          </a:p>
+          <a:p>
+            <a:pPr>
+              <a:spcAft>
+                <a:spcPts val="600"/>
+              </a:spcAft>
+            </a:pPr>
+            <a:r>
+              <a:rPr sz="1500">
+                <a:solidFill>
+                  <a:srgbClr val="22282E"/>
+                </a:solidFill>
+              </a:rPr>
+              <a:t>•  Prueba atómica: procedimiento pequeño y aislado.</a:t>
+            </a:r>
+          </a:p>
+          <a:p>
+            <a:pPr>
+              <a:spcAft>
+                <a:spcPts val="600"/>
+              </a:spcAft>
+            </a:pPr>
+            <a:r>
+              <a:rPr sz="1500">
+                <a:solidFill>
+                  <a:srgbClr val="22282E"/>
+                </a:solidFill>
+              </a:rPr>
+              <a:t>•  Emulación: secuencia de comportamiento adversario.</a:t>
+            </a:r>
+          </a:p>
+          <a:p>
+            <a:pPr>
+              <a:spcAft>
+                <a:spcPts val="600"/>
+              </a:spcAft>
+            </a:pPr>
+            <a:r>
+              <a:rPr sz="1500">
+                <a:solidFill>
+                  <a:srgbClr val="22282E"/>
+                </a:solidFill>
+              </a:rPr>
+              <a:t>•  Control objective: resultado defensivo verificable.</a:t>
+            </a:r>
+          </a:p>
+          <a:p>
+            <a:pPr>
+              <a:spcAft>
+                <a:spcPts val="600"/>
+              </a:spcAft>
+            </a:pPr>
+            <a:r>
+              <a:rPr sz="1500">
+                <a:solidFill>
+                  <a:srgbClr val="22282E"/>
+                </a:solidFill>
+              </a:rPr>
+              <a:t>•  Scorecard: evidencia separada por capa.</a:t>
+            </a:r>
+          </a:p>
+          <a:p>
+            <a:pPr>
+              <a:spcAft>
+                <a:spcPts val="600"/>
+              </a:spcAft>
+            </a:pPr>
+            <a:r>
+              <a:rPr sz="1500">
+                <a:solidFill>
+                  <a:srgbClr val="22282E"/>
+                </a:solidFill>
+              </a:rPr>
+              <a:t>•  Cleanup: reversión de artefactos de prueba.</a:t>
+            </a:r>
+          </a:p>
+          <a:p>
+            <a:pPr>
+              <a:spcAft>
+                <a:spcPts val="600"/>
+              </a:spcAft>
+            </a:pPr>
+            <a:r>
+              <a:rPr sz="1500">
+                <a:solidFill>
+                  <a:srgbClr val="22282E"/>
+                </a:solidFill>
+              </a:rPr>
+              <a:t>•  Regresión: repetición que confirma la corrección.</a:t>
             </a:r>
           </a:p>
         </p:txBody>
@@ -4450,7 +5156,7 @@
                   <a:srgbClr val="0B3D2E"/>
                 </a:solidFill>
               </a:rPr>
-              <a:t>🧪 Laboratorio guiado — Un ciclo purple completo</a:t>
+              <a:t>📖 Definiciones y características</a:t>
             </a:r>
           </a:p>
         </p:txBody>
@@ -4488,97 +5194,97 @@
                   <a:srgbClr val="22282E"/>
                 </a:solidFill>
               </a:rPr>
-              <a:t>•  Planifica. Elige un grupo de amenaza relevante (de la página Groups de ATT&amp;CK) y selecciona 8–10 técnicas suyas a emular.</a:t>
-            </a:r>
-          </a:p>
-          <a:p>
-            <a:pPr>
-              <a:spcAft>
-                <a:spcPts val="600"/>
-              </a:spcAft>
-            </a:pPr>
-            <a:r>
-              <a:rPr sz="1500">
-                <a:solidFill>
-                  <a:srgbClr val="22282E"/>
-                </a:solidFill>
-              </a:rPr>
-              <a:t>•  Prepara la scorecard. Crea una capa de Navigator con esas técnicas y un estado inicial "por probar".</a:t>
-            </a:r>
-          </a:p>
-          <a:p>
-            <a:pPr>
-              <a:spcAft>
-                <a:spcPts val="600"/>
-              </a:spcAft>
-            </a:pPr>
-            <a:r>
-              <a:rPr sz="1500">
-                <a:solidFill>
-                  <a:srgbClr val="22282E"/>
-                </a:solidFill>
-              </a:rPr>
-              <a:t>•  Ejecuta pruebas atómicas. Con Atomic Red Team, lanza cada técnica en el host de laboratorio (p. ej. T1059.001, T1053.005, T1105).</a:t>
-            </a:r>
-          </a:p>
-          <a:p>
-            <a:pPr>
-              <a:spcAft>
-                <a:spcPts val="600"/>
-              </a:spcAft>
-            </a:pPr>
-            <a:r>
-              <a:rPr sz="1500">
-                <a:solidFill>
-                  <a:srgbClr val="22282E"/>
-                </a:solidFill>
-              </a:rPr>
-              <a:t>•  Observa la detección. Para cada una, comprueba en el SIEM/EDR si fue prevenida, detectada, solo registrada o no vista.</a:t>
-            </a:r>
-          </a:p>
-          <a:p>
-            <a:pPr>
-              <a:spcAft>
-                <a:spcPts val="600"/>
-              </a:spcAft>
-            </a:pPr>
-            <a:r>
-              <a:rPr sz="1500">
-                <a:solidFill>
-                  <a:srgbClr val="22282E"/>
-                </a:solidFill>
-              </a:rPr>
-              <a:t>•  Encadena con Caldera. Lanza una operación que combine varias técnicas en secuencia y observa si detectas la cadena, no solo pasos sueltos.</a:t>
-            </a:r>
-          </a:p>
-          <a:p>
-            <a:pPr>
-              <a:spcAft>
-                <a:spcPts val="600"/>
-              </a:spcAft>
-            </a:pPr>
-            <a:r>
-              <a:rPr sz="1500">
-                <a:solidFill>
-                  <a:srgbClr val="22282E"/>
-                </a:solidFill>
-              </a:rPr>
-              <a:t>•  Puntúa. Colorea la scorecard: verde detectado, amarillo solo registrado, rojo no visto.</a:t>
-            </a:r>
-          </a:p>
-          <a:p>
-            <a:pPr>
-              <a:spcAft>
-                <a:spcPts val="600"/>
-              </a:spcAft>
-            </a:pPr>
-            <a:r>
-              <a:rPr sz="1500">
-                <a:solidFill>
-                  <a:srgbClr val="22282E"/>
-                </a:solidFill>
-              </a:rPr>
-              <a:t>•  Cierra huecos. Por cada técnica no vista o solo registrada, crea/afina una detección (Sigma) y vuelve a probar hasta que dispare.</a:t>
+              <a:t>•  Purple team: ejercicio colaborativo donde red ejecuta técnicas y blue mide y mejora la detección en tiempo real. Característica: objetivo compartido de subir la cobertura.</a:t>
+            </a:r>
+          </a:p>
+          <a:p>
+            <a:pPr>
+              <a:spcAft>
+                <a:spcPts val="600"/>
+              </a:spcAft>
+            </a:pPr>
+            <a:r>
+              <a:rPr sz="1500">
+                <a:solidFill>
+                  <a:srgbClr val="22282E"/>
+                </a:solidFill>
+              </a:rPr>
+              <a:t>•  Emulación de adversario: reproducir el comportamiento de un actor real (sus TTPs) de forma fiel. Característica: guiada por intel de un grupo concreto.</a:t>
+            </a:r>
+          </a:p>
+          <a:p>
+            <a:pPr>
+              <a:spcAft>
+                <a:spcPts val="600"/>
+              </a:spcAft>
+            </a:pPr>
+            <a:r>
+              <a:rPr sz="1500">
+                <a:solidFill>
+                  <a:srgbClr val="22282E"/>
+                </a:solidFill>
+              </a:rPr>
+              <a:t>•  Atomic Red Team: biblioteca de pruebas pequeñas y atómicas, una por técnica ATT&amp;CK. Característica: rápidas, granulares y reproducibles.</a:t>
+            </a:r>
+          </a:p>
+          <a:p>
+            <a:pPr>
+              <a:spcAft>
+                <a:spcPts val="600"/>
+              </a:spcAft>
+            </a:pPr>
+            <a:r>
+              <a:rPr sz="1500">
+                <a:solidFill>
+                  <a:srgbClr val="22282E"/>
+                </a:solidFill>
+              </a:rPr>
+              <a:t>•  Caldera: plataforma de MITRE para emulación automatizada y encadenada. Característica: ejecuta operaciones completas con agentes.</a:t>
+            </a:r>
+          </a:p>
+          <a:p>
+            <a:pPr>
+              <a:spcAft>
+                <a:spcPts val="600"/>
+              </a:spcAft>
+            </a:pPr>
+            <a:r>
+              <a:rPr sz="1500">
+                <a:solidFill>
+                  <a:srgbClr val="22282E"/>
+                </a:solidFill>
+              </a:rPr>
+              <a:t>•  Scorecard de detección: matriz de resultados por técnica (prevenido/detectado/registrado/no visto). Característica: comunica la cobertura real.</a:t>
+            </a:r>
+          </a:p>
+          <a:p>
+            <a:pPr>
+              <a:spcAft>
+                <a:spcPts val="600"/>
+              </a:spcAft>
+            </a:pPr>
+            <a:r>
+              <a:rPr sz="1500">
+                <a:solidFill>
+                  <a:srgbClr val="22282E"/>
+                </a:solidFill>
+              </a:rPr>
+              <a:t>•  Cierre del bucle: crear/afinar una detección por cada hueco hallado. Característica: convierte el ejercicio en mejora permanente.</a:t>
+            </a:r>
+          </a:p>
+          <a:p>
+            <a:pPr>
+              <a:spcAft>
+                <a:spcPts val="600"/>
+              </a:spcAft>
+            </a:pPr>
+            <a:r>
+              <a:rPr sz="1500">
+                <a:solidFill>
+                  <a:srgbClr val="22282E"/>
+                </a:solidFill>
+              </a:rPr>
+              <a:t>•  Cadencia: frecuencia de los ejercicios purple. Característica: el valor está en la repetición, no en un evento aislado.</a:t>
             </a:r>
           </a:p>
         </p:txBody>
@@ -4629,7 +5335,7 @@
                   <a:srgbClr val="0B3D2E"/>
                 </a:solidFill>
               </a:rPr>
-              <a:t>✍️ Ejercicios</a:t>
+              <a:t>🔍 Ejercicio resuelto — cuatro capas de evidencia</a:t>
             </a:r>
           </a:p>
         </p:txBody>
@@ -4667,82 +5373,37 @@
                   <a:srgbClr val="22282E"/>
                 </a:solidFill>
               </a:rPr>
-              <a:t>•  Selecciona un grupo ATT&amp;CK y justifica por qué emularlo en tu contexto.</a:t>
-            </a:r>
-          </a:p>
-          <a:p>
-            <a:pPr>
-              <a:spcAft>
-                <a:spcPts val="600"/>
-              </a:spcAft>
-            </a:pPr>
-            <a:r>
-              <a:rPr sz="1500">
-                <a:solidFill>
-                  <a:srgbClr val="22282E"/>
-                </a:solidFill>
-              </a:rPr>
-              <a:t>•  Ejecuta 3 pruebas atómicas y clasifica su resultado (prevenido/detectado/no visto).</a:t>
-            </a:r>
-          </a:p>
-          <a:p>
-            <a:pPr>
-              <a:spcAft>
-                <a:spcPts val="600"/>
-              </a:spcAft>
-            </a:pPr>
-            <a:r>
-              <a:rPr sz="1500">
-                <a:solidFill>
-                  <a:srgbClr val="22282E"/>
-                </a:solidFill>
-              </a:rPr>
-              <a:t>•  Diseña una operación encadenada en Caldera con 4 técnicas.</a:t>
-            </a:r>
-          </a:p>
-          <a:p>
-            <a:pPr>
-              <a:spcAft>
-                <a:spcPts val="600"/>
-              </a:spcAft>
-            </a:pPr>
-            <a:r>
-              <a:rPr sz="1500">
-                <a:solidFill>
-                  <a:srgbClr val="22282E"/>
-                </a:solidFill>
-              </a:rPr>
-              <a:t>•  Construye una scorecard de detección en Navigator.</a:t>
-            </a:r>
-          </a:p>
-          <a:p>
-            <a:pPr>
-              <a:spcAft>
-                <a:spcPts val="600"/>
-              </a:spcAft>
-            </a:pPr>
-            <a:r>
-              <a:rPr sz="1500">
-                <a:solidFill>
-                  <a:srgbClr val="22282E"/>
-                </a:solidFill>
-              </a:rPr>
-              <a:t>•  Cierra un hueco creando una detección nueva y revalidándola.</a:t>
-            </a:r>
-          </a:p>
-          <a:p>
-            <a:pPr>
-              <a:spcAft>
-                <a:spcPts val="600"/>
-              </a:spcAft>
-            </a:pPr>
-            <a:r>
-              <a:rPr sz="1500">
-                <a:solidFill>
-                  <a:srgbClr val="22282E"/>
-                </a:solidFill>
-              </a:rPr>
-              <a:t>•  Define la cadencia y el alcance de un programa purple trimestral.</a:t>
+              <a:t>•  Se selecciona una prueba atómica autorizada de ejecución de intérprete. El plan fija host, usuario, tiempo, prerequisitos, detención y cleanup. Blue team no conoce el minuto exacto, pero sí la…</a:t>
+            </a:r>
+          </a:p>
+          <a:p>
+            <a:pPr>
+              <a:spcAft>
+                <a:spcPts val="600"/>
+              </a:spcAft>
+            </a:pPr>
+            <a:r>
+              <a:rPr sz="1500">
+                <a:solidFill>
+                  <a:srgbClr val="22282E"/>
+                </a:solidFill>
+              </a:rPr>
+              <a:t>•  El procedimiento se ejecuta. El scorecard encuentra: telemetría presente; regla coincidente; notable suprimido por una excepción vencida; por tanto no hubo triaje. «No detectado» habría ocultado que…</a:t>
+            </a:r>
+          </a:p>
+          <a:p>
+            <a:pPr>
+              <a:spcAft>
+                <a:spcPts val="600"/>
+              </a:spcAft>
+            </a:pPr>
+            <a:r>
+              <a:rPr sz="1500">
+                <a:solidFill>
+                  <a:srgbClr val="22282E"/>
+                </a:solidFill>
+              </a:rPr>
+              <a:t>•  Después Apache Caldera orquesta una cadena en laboratorio para estudiar transiciones, manteniendo versión y perfil. El resultado no reemplaza la prueba atómica: responde otra pregunta. Cada brecha…</a:t>
             </a:r>
           </a:p>
         </p:txBody>
@@ -4793,7 +5454,7 @@
                   <a:srgbClr val="0B3D2E"/>
                 </a:solidFill>
               </a:rPr>
-              <a:t>📝 Reto verificable</a:t>
+              <a:t>✅ Criterio de dominio</a:t>
             </a:r>
           </a:p>
         </p:txBody>
@@ -4831,7 +5492,7 @@
                   <a:srgbClr val="22282E"/>
                 </a:solidFill>
               </a:rPr>
-              <a:t>•  Ejecuta un ciclo purple completo sobre al menos 8 técnicas: emúlalas, puntúa la cobertura, cierra los huecos con detecciones nuevas y revalida. Criterio de aceptación: entregas una scorecard antes/después que muestra una mejora medible de cobertura, cada técnica inicialmente "no vista" acaba con una detección que dispara al re-ejecutarla, y todo el ejercicio está documentado con su alcance y ejecutado en tu entorno autorizado.</a:t>
+              <a:t>•  El alumno distingue prueba y emulación, presenta evidencia por capa, aplica cleanup y demuestra regresión. Ejecutar una herramienta y mostrar una captura sin cambio verificado no completa purple…</a:t>
             </a:r>
           </a:p>
         </p:txBody>
